--- a/public/fun/pack/pptx/weddingpro/결혼식프리미엄_08_식순중심_아이스블루.pptx
+++ b/public/fun/pack/pptx/weddingpro/결혼식프리미엄_08_식순중심_아이스블루.pptx
@@ -113,12 +113,12 @@
   <p:extLst>
     <p:ext uri="{521415D9-36F7-43E2-AB2F-B90AF26B5E84}">
       <p14:sectionLst xmlns:p14="http://schemas.microsoft.com/office/powerpoint/2010/main">
-        <p14:section name="시작" id="{ABABE6BA-4007-4F4D-A608-5A73B7396057}">
+        <p14:section name="시작" id="{55994EB9-01BA-4DFA-A255-111895FA853D}">
           <p14:sldIdLst>
             <p14:sldId id="256"/>
           </p14:sldIdLst>
         </p14:section>
-        <p14:section name="본문" id="{067650C4-66B3-4121-B881-94331BCC44D0}">
+        <p14:section name="본문" id="{3C9F7682-3E72-410A-BECD-F0D9F3853D59}">
           <p14:sldIdLst>
             <p14:sldId id="257"/>
             <p14:sldId id="258"/>
@@ -127,7 +127,7 @@
             <p14:sldId id="261"/>
           </p14:sldIdLst>
         </p14:section>
-        <p14:section name="마무리" id="{0A8F2017-8D0B-4299-8E9D-EECB24A3EAD5}">
+        <p14:section name="마무리" id="{92FB22B3-1B5A-4874-9005-EC586939846B}">
           <p14:sldIdLst>
             <p14:sldId id="262"/>
           </p14:sldIdLst>
@@ -1539,7 +1539,7 @@
             </a:lvl1pPr>
           </a:lstStyle>
           <a:p>
-            <a:fld id="{6187278F-2EEF-4F4F-B113-843818A7A457}" type="slidenum">
+            <a:fld id="{160402B0-3D67-4BE5-916E-9C57E4A7945C}" type="slidenum">
               <a:rPr lang="en-US"/>
               <a:t>‹#›</a:t>
             </a:fld>
@@ -2167,7 +2167,7 @@
             </a:lvl1pPr>
           </a:lstStyle>
           <a:p>
-            <a:fld id="{45DCE9FD-5C92-4501-9A1E-E2BF9808D00C}" type="slidenum">
+            <a:fld id="{F925A2B0-B9BF-4AD7-8A53-30367DFE607B}" type="slidenum">
               <a:rPr lang="en-US"/>
               <a:t>‹#›</a:t>
             </a:fld>
@@ -2804,7 +2804,7 @@
             </a:lvl1pPr>
           </a:lstStyle>
           <a:p>
-            <a:fld id="{C893A936-5901-441D-BA2E-74BBC51C8BBB}" type="slidenum">
+            <a:fld id="{BFEEA9C4-E872-47A2-9309-24DAE7C6F562}" type="slidenum">
               <a:rPr lang="en-US"/>
               <a:t>‹#›</a:t>
             </a:fld>
@@ -3671,7 +3671,7 @@
           <a:p>
             <a:r>
               <a:rPr lang="ko-KR"/>
-              <a:t>0000. 00. 00 · 예식장 이름</a:t>
+              <a:t>날짜 입력 · 예식장 이름</a:t>
             </a:r>
           </a:p>
         </p:txBody>
@@ -3894,7 +3894,7 @@
           <a:bodyPr/>
           <a:lstStyle/>
           <a:p>
-            <a:fld id="{CA7DB4EB-5A70-49A4-9F44-ACDD2CBC9ACE}" type="slidenum">
+            <a:fld id="{041E475F-5B6A-4134-89B4-7FBC76B887FD}" type="slidenum">
               <a:rPr lang="en-US"/>
               <a:t>‹#›</a:t>
             </a:fld>
@@ -4346,7 +4346,7 @@
           <a:bodyPr/>
           <a:lstStyle/>
           <a:p>
-            <a:fld id="{F438F06F-02F4-4219-8F74-CF3FBBE74E23}" type="slidenum">
+            <a:fld id="{6C0A40E5-5CB8-42C1-A293-A15C757840F2}" type="slidenum">
               <a:rPr lang="en-US"/>
               <a:t>‹#›</a:t>
             </a:fld>
@@ -5175,7 +5175,7 @@
           <a:bodyPr/>
           <a:lstStyle/>
           <a:p>
-            <a:fld id="{34E3B89D-6CF6-4AD3-9634-C58D9ABD097C}" type="slidenum">
+            <a:fld id="{FE80CEF0-9EA2-4E95-810B-920F0ABC2BDB}" type="slidenum">
               <a:rPr lang="en-US"/>
               <a:t>‹#›</a:t>
             </a:fld>
@@ -6535,7 +6535,7 @@
           <a:bodyPr/>
           <a:lstStyle/>
           <a:p>
-            <a:fld id="{7462C44B-E0B7-480F-8D7B-C0FCCB208E14}" type="slidenum">
+            <a:fld id="{0013EEA7-A9C9-4456-96A9-4040C4E0AF58}" type="slidenum">
               <a:rPr lang="en-US"/>
               <a:t>‹#›</a:t>
             </a:fld>
@@ -6623,7 +6623,7 @@
           <a:bodyPr/>
           <a:lstStyle/>
           <a:p>
-            <a:fld id="{BCC97B7F-6ADC-42E2-8F7F-7210844FB5C2}" type="slidenum">
+            <a:fld id="{E5CEB19F-F403-486B-A6EF-F1838D921843}" type="slidenum">
               <a:rPr lang="en-US"/>
               <a:t>‹#›</a:t>
             </a:fld>
